--- a/研究リソーストラッキングシステム.pptx
+++ b/研究リソーストラッキングシステム.pptx
@@ -8654,7 +8654,7 @@
         <p:spPr>
           <a:xfrm>
             <a:off x="-23815" y="586627"/>
-            <a:ext cx="7012555" cy="5693866"/>
+            <a:ext cx="7012555" cy="5632311"/>
           </a:xfrm>
           <a:prstGeom prst="rect">
             <a:avLst/>
@@ -9037,15 +9037,18 @@
             </a:pPr>
             <a:r>
               <a:rPr lang="ja-JP" altLang="en-US" sz="1400"/>
-              <a:t>エッジリストとノードリストの結合に</a:t>
-            </a:r>
-            <a:r>
-              <a:rPr lang="en-US" altLang="ja-JP" sz="1400"/>
-              <a:t>AND/OR</a:t>
-            </a:r>
-            <a:r>
-              <a:rPr lang="ja-JP" altLang="en-US" sz="1400"/>
-              <a:t>がある。切り替えて両方使えるかは調査中。</a:t>
+              <a:t>エッジリストとノードリストの結合則：</a:t>
+            </a:r>
+            <a:endParaRPr lang="en-US" altLang="ja-JP" sz="1400"/>
+          </a:p>
+          <a:p>
+            <a:pPr marL="1200150" lvl="2" indent="-285750">
+              <a:buFont typeface="Arial" panose="020B0604020202020204" pitchFamily="34" charset="0"/>
+              <a:buChar char="•"/>
+            </a:pPr>
+            <a:r>
+              <a:rPr kumimoji="1" lang="en-US" altLang="ja-JP" sz="1400"/>
+              <a:t>Wolfram: OR</a:t>
             </a:r>
             <a:endParaRPr kumimoji="1" lang="ja-JP" altLang="en-US" sz="1400"/>
           </a:p>
